--- a/knf/decks/d4p3.pptx
+++ b/knf/decks/d4p3.pptx
@@ -3783,7 +3783,7 @@
                 <a:ea typeface="Pretendard"/>
                 <a:cs typeface="Pretendard"/>
               </a:rPr>
-              <a:t>이 45분이 끝날 때 확인할 것</a:t>
+              <a:t>이 50분이 끝날 때 확인할 것</a:t>
             </a:r>
           </a:p>
         </p:txBody>
@@ -5506,7 +5506,7 @@
                 <a:ea typeface="Pretendard"/>
                 <a:cs typeface="Pretendard"/>
               </a:rPr>
-              <a:t>45분 뒤에는</a:t>
+              <a:t>50분 뒤에는</a:t>
             </a:r>
           </a:p>
         </p:txBody>

--- a/knf/decks/d4p3.pptx
+++ b/knf/decks/d4p3.pptx
@@ -3100,7 +3100,7 @@
       <p:grpSpPr/>
       <p:sp>
         <p:nvSpPr>
-          <p:cNvPr id="2" name="Oval 1"/>
+          <p:cNvPr id="2" name="deckgen:decor"/>
           <p:cNvSpPr/>
           <p:nvPr/>
         </p:nvSpPr>
@@ -3130,7 +3130,7 @@
       </p:sp>
       <p:sp>
         <p:nvSpPr>
-          <p:cNvPr id="3" name="Oval 2"/>
+          <p:cNvPr id="3" name="deckgen:decor"/>
           <p:cNvSpPr/>
           <p:nvPr/>
         </p:nvSpPr>
@@ -3160,7 +3160,7 @@
       </p:sp>
       <p:sp>
         <p:nvSpPr>
-          <p:cNvPr id="4" name="Oval 3"/>
+          <p:cNvPr id="4" name="deckgen:decor"/>
           <p:cNvSpPr/>
           <p:nvPr/>
         </p:nvSpPr>
@@ -3190,7 +3190,7 @@
       </p:sp>
       <p:sp>
         <p:nvSpPr>
-          <p:cNvPr id="5" name="Rectangle 4"/>
+          <p:cNvPr id="5" name="deckgen:decor"/>
           <p:cNvSpPr/>
           <p:nvPr/>
         </p:nvSpPr>
@@ -3220,7 +3220,7 @@
       </p:sp>
       <p:sp>
         <p:nvSpPr>
-          <p:cNvPr id="6" name="Oval 5"/>
+          <p:cNvPr id="6" name="deckgen:decor"/>
           <p:cNvSpPr/>
           <p:nvPr/>
         </p:nvSpPr>
@@ -3250,7 +3250,7 @@
       </p:sp>
       <p:sp>
         <p:nvSpPr>
-          <p:cNvPr id="7" name="Oval 6"/>
+          <p:cNvPr id="7" name="deckgen:decor"/>
           <p:cNvSpPr/>
           <p:nvPr/>
         </p:nvSpPr>
@@ -3280,7 +3280,7 @@
       </p:sp>
       <p:sp>
         <p:nvSpPr>
-          <p:cNvPr id="8" name="Oval 7"/>
+          <p:cNvPr id="8" name="deckgen:decor"/>
           <p:cNvSpPr/>
           <p:nvPr/>
         </p:nvSpPr>
@@ -3310,7 +3310,7 @@
       </p:sp>
       <p:sp>
         <p:nvSpPr>
-          <p:cNvPr id="9" name="Oval 8"/>
+          <p:cNvPr id="9" name="deckgen:decor"/>
           <p:cNvSpPr/>
           <p:nvPr/>
         </p:nvSpPr>
@@ -3340,7 +3340,7 @@
       </p:sp>
       <p:sp>
         <p:nvSpPr>
-          <p:cNvPr id="10" name="Rectangle 9"/>
+          <p:cNvPr id="10" name="deckgen:decor"/>
           <p:cNvSpPr/>
           <p:nvPr/>
         </p:nvSpPr>
@@ -3618,7 +3618,7 @@
       <p:grpSpPr/>
       <p:sp>
         <p:nvSpPr>
-          <p:cNvPr id="2" name="Oval 1"/>
+          <p:cNvPr id="2" name="deckgen:decor"/>
           <p:cNvSpPr/>
           <p:nvPr/>
         </p:nvSpPr>
@@ -3648,7 +3648,7 @@
       </p:sp>
       <p:sp>
         <p:nvSpPr>
-          <p:cNvPr id="3" name="Oval 2"/>
+          <p:cNvPr id="3" name="deckgen:decor"/>
           <p:cNvSpPr/>
           <p:nvPr/>
         </p:nvSpPr>
@@ -3678,7 +3678,7 @@
       </p:sp>
       <p:sp>
         <p:nvSpPr>
-          <p:cNvPr id="4" name="Oval 3"/>
+          <p:cNvPr id="4" name="deckgen:decor"/>
           <p:cNvSpPr/>
           <p:nvPr/>
         </p:nvSpPr>
@@ -4534,7 +4534,7 @@
       <p:grpSpPr/>
       <p:sp>
         <p:nvSpPr>
-          <p:cNvPr id="2" name="Oval 1"/>
+          <p:cNvPr id="2" name="deckgen:decor"/>
           <p:cNvSpPr/>
           <p:nvPr/>
         </p:nvSpPr>
@@ -4564,7 +4564,7 @@
       </p:sp>
       <p:sp>
         <p:nvSpPr>
-          <p:cNvPr id="3" name="Oval 2"/>
+          <p:cNvPr id="3" name="deckgen:decor"/>
           <p:cNvSpPr/>
           <p:nvPr/>
         </p:nvSpPr>
@@ -5341,7 +5341,7 @@
       <p:grpSpPr/>
       <p:sp>
         <p:nvSpPr>
-          <p:cNvPr id="2" name="Oval 1"/>
+          <p:cNvPr id="2" name="deckgen:decor"/>
           <p:cNvSpPr/>
           <p:nvPr/>
         </p:nvSpPr>
@@ -5371,7 +5371,7 @@
       </p:sp>
       <p:sp>
         <p:nvSpPr>
-          <p:cNvPr id="3" name="Oval 2"/>
+          <p:cNvPr id="3" name="deckgen:decor"/>
           <p:cNvSpPr/>
           <p:nvPr/>
         </p:nvSpPr>
@@ -5401,7 +5401,7 @@
       </p:sp>
       <p:sp>
         <p:nvSpPr>
-          <p:cNvPr id="4" name="Oval 3"/>
+          <p:cNvPr id="4" name="deckgen:decor"/>
           <p:cNvSpPr/>
           <p:nvPr/>
         </p:nvSpPr>
@@ -6186,7 +6186,7 @@
       <p:grpSpPr/>
       <p:sp>
         <p:nvSpPr>
-          <p:cNvPr id="2" name="Oval 1"/>
+          <p:cNvPr id="2" name="deckgen:decor"/>
           <p:cNvSpPr/>
           <p:nvPr/>
         </p:nvSpPr>
@@ -6216,7 +6216,7 @@
       </p:sp>
       <p:sp>
         <p:nvSpPr>
-          <p:cNvPr id="3" name="Oval 2"/>
+          <p:cNvPr id="3" name="deckgen:decor"/>
           <p:cNvSpPr/>
           <p:nvPr/>
         </p:nvSpPr>
@@ -6246,7 +6246,7 @@
       </p:sp>
       <p:sp>
         <p:nvSpPr>
-          <p:cNvPr id="4" name="Oval 3"/>
+          <p:cNvPr id="4" name="deckgen:decor"/>
           <p:cNvSpPr/>
           <p:nvPr/>
         </p:nvSpPr>
@@ -8343,7 +8343,7 @@
       <p:grpSpPr/>
       <p:sp>
         <p:nvSpPr>
-          <p:cNvPr id="2" name="Oval 1"/>
+          <p:cNvPr id="2" name="deckgen:decor"/>
           <p:cNvSpPr/>
           <p:nvPr/>
         </p:nvSpPr>
@@ -8373,7 +8373,7 @@
       </p:sp>
       <p:sp>
         <p:nvSpPr>
-          <p:cNvPr id="3" name="Oval 2"/>
+          <p:cNvPr id="3" name="deckgen:decor"/>
           <p:cNvSpPr/>
           <p:nvPr/>
         </p:nvSpPr>
@@ -8403,7 +8403,7 @@
       </p:sp>
       <p:sp>
         <p:nvSpPr>
-          <p:cNvPr id="4" name="Oval 3"/>
+          <p:cNvPr id="4" name="deckgen:decor"/>
           <p:cNvSpPr/>
           <p:nvPr/>
         </p:nvSpPr>
@@ -9404,7 +9404,7 @@
       <p:grpSpPr/>
       <p:sp>
         <p:nvSpPr>
-          <p:cNvPr id="2" name="Oval 1"/>
+          <p:cNvPr id="2" name="deckgen:decor"/>
           <p:cNvSpPr/>
           <p:nvPr/>
         </p:nvSpPr>
@@ -9434,7 +9434,7 @@
       </p:sp>
       <p:sp>
         <p:nvSpPr>
-          <p:cNvPr id="3" name="Oval 2"/>
+          <p:cNvPr id="3" name="deckgen:decor"/>
           <p:cNvSpPr/>
           <p:nvPr/>
         </p:nvSpPr>
@@ -9464,7 +9464,7 @@
       </p:sp>
       <p:sp>
         <p:nvSpPr>
-          <p:cNvPr id="4" name="Oval 3"/>
+          <p:cNvPr id="4" name="deckgen:decor"/>
           <p:cNvSpPr/>
           <p:nvPr/>
         </p:nvSpPr>
@@ -10431,7 +10431,7 @@
       <p:grpSpPr/>
       <p:sp>
         <p:nvSpPr>
-          <p:cNvPr id="2" name="Oval 1"/>
+          <p:cNvPr id="2" name="deckgen:decor"/>
           <p:cNvSpPr/>
           <p:nvPr/>
         </p:nvSpPr>
@@ -10461,7 +10461,7 @@
       </p:sp>
       <p:sp>
         <p:nvSpPr>
-          <p:cNvPr id="3" name="Oval 2"/>
+          <p:cNvPr id="3" name="deckgen:decor"/>
           <p:cNvSpPr/>
           <p:nvPr/>
         </p:nvSpPr>
@@ -10491,7 +10491,7 @@
       </p:sp>
       <p:sp>
         <p:nvSpPr>
-          <p:cNvPr id="4" name="Oval 3"/>
+          <p:cNvPr id="4" name="deckgen:decor"/>
           <p:cNvSpPr/>
           <p:nvPr/>
         </p:nvSpPr>
@@ -12588,7 +12588,7 @@
       <p:grpSpPr/>
       <p:sp>
         <p:nvSpPr>
-          <p:cNvPr id="2" name="Oval 1"/>
+          <p:cNvPr id="2" name="deckgen:decor"/>
           <p:cNvSpPr/>
           <p:nvPr/>
         </p:nvSpPr>
@@ -12618,7 +12618,7 @@
       </p:sp>
       <p:sp>
         <p:nvSpPr>
-          <p:cNvPr id="3" name="Oval 2"/>
+          <p:cNvPr id="3" name="deckgen:decor"/>
           <p:cNvSpPr/>
           <p:nvPr/>
         </p:nvSpPr>
@@ -12648,7 +12648,7 @@
       </p:sp>
       <p:sp>
         <p:nvSpPr>
-          <p:cNvPr id="4" name="Oval 3"/>
+          <p:cNvPr id="4" name="deckgen:decor"/>
           <p:cNvSpPr/>
           <p:nvPr/>
         </p:nvSpPr>
@@ -13668,7 +13668,7 @@
       <p:grpSpPr/>
       <p:sp>
         <p:nvSpPr>
-          <p:cNvPr id="2" name="Oval 1"/>
+          <p:cNvPr id="2" name="deckgen:decor"/>
           <p:cNvSpPr/>
           <p:nvPr/>
         </p:nvSpPr>
@@ -13698,7 +13698,7 @@
       </p:sp>
       <p:sp>
         <p:nvSpPr>
-          <p:cNvPr id="3" name="Oval 2"/>
+          <p:cNvPr id="3" name="deckgen:decor"/>
           <p:cNvSpPr/>
           <p:nvPr/>
         </p:nvSpPr>
@@ -13728,7 +13728,7 @@
       </p:sp>
       <p:sp>
         <p:nvSpPr>
-          <p:cNvPr id="4" name="Oval 3"/>
+          <p:cNvPr id="4" name="deckgen:decor"/>
           <p:cNvSpPr/>
           <p:nvPr/>
         </p:nvSpPr>
@@ -14662,7 +14662,7 @@
       <p:grpSpPr/>
       <p:sp>
         <p:nvSpPr>
-          <p:cNvPr id="2" name="Oval 1"/>
+          <p:cNvPr id="2" name="deckgen:decor"/>
           <p:cNvSpPr/>
           <p:nvPr/>
         </p:nvSpPr>
@@ -14692,7 +14692,7 @@
       </p:sp>
       <p:sp>
         <p:nvSpPr>
-          <p:cNvPr id="3" name="Oval 2"/>
+          <p:cNvPr id="3" name="deckgen:decor"/>
           <p:cNvSpPr/>
           <p:nvPr/>
         </p:nvSpPr>
@@ -14722,7 +14722,7 @@
       </p:sp>
       <p:sp>
         <p:nvSpPr>
-          <p:cNvPr id="4" name="Oval 3"/>
+          <p:cNvPr id="4" name="deckgen:decor"/>
           <p:cNvSpPr/>
           <p:nvPr/>
         </p:nvSpPr>
